--- a/data-eng/decks/w2d3s2.pptx
+++ b/data-eng/decks/w2d3s2.pptx
@@ -4399,7 +4399,7 @@
                 <a:ea typeface="Pretendard"/>
                 <a:cs typeface="Pretendard"/>
               </a:rPr>
-              <a:t>de-mongo 컨테이너 Up 상태 유지</a:t>
+              <a:t>mongosh 창은 두고 새 터미널 하나 더</a:t>
             </a:r>
           </a:p>
         </p:txBody>
@@ -7136,7 +7136,7 @@
                 <a:ea typeface="Pretendard"/>
                 <a:cs typeface="Pretendard"/>
               </a:rPr>
-              <a:t>docker ps · docker logs de-mongo | tail -n 3</a:t>
+              <a:t>docker exec de-mongo mongosh --quiet --eval "…ping…"</a:t>
             </a:r>
           </a:p>
         </p:txBody>
@@ -7177,7 +7177,7 @@
                 <a:ea typeface="Pretendard"/>
                 <a:cs typeface="Pretendard"/>
               </a:rPr>
-              <a:t>Up 상태이고 로그 끝에 「Waiting for connections」면 준비 완료</a:t>
+              <a:t>1 이면 준비 완료 — 켜자마자는 ECONNREFUSED, 1초 뒤 다시(실측)</a:t>
             </a:r>
           </a:p>
         </p:txBody>
@@ -7364,7 +7364,7 @@
                 <a:ea typeface="Pretendard"/>
                 <a:cs typeface="Pretendard"/>
               </a:rPr>
-              <a:t>test&gt; 프롬프트 — db.version() 이 7.0.x 를 출력</a:t>
+              <a:t>첫 화면 경고 세 줄은 정상 — test&gt; 에서 db.version() 은 7.0.43</a:t>
             </a:r>
           </a:p>
         </p:txBody>
@@ -12783,7 +12783,7 @@
                 <a:ea typeface="Pretendard"/>
                 <a:cs typeface="Pretendard"/>
               </a:rPr>
-              <a:t>문서 전체가 그 내용으로 교체돼 나머지 필드가 사라진다 — 최신 버전은 오류로 막지만 예전 코드에서 자주 난 사고</a:t>
+              <a:t>MongoInvalidArgumentError: Update document requires atomic operators 로 막힌다(실측)</a:t>
             </a:r>
           </a:p>
         </p:txBody>
@@ -13526,7 +13526,7 @@
                 <a:ea typeface="Pretendard"/>
                 <a:cs typeface="Pretendard"/>
               </a:rPr>
-              <a:t>find({ level: 'ERROR' }).count()</a:t>
+              <a:t>countDocuments({ level: 'ERROR' })</a:t>
             </a:r>
           </a:p>
         </p:txBody>
@@ -13631,7 +13631,7 @@
                 <a:ea typeface="Pretendard"/>
                 <a:cs typeface="Pretendard"/>
               </a:rPr>
-              <a:t>오타 문서는 잡히지 않는다 — 오류도 없다</a:t>
+              <a:t>2 가 아니라 1 — 오타 문서는 오류도 없이 빠진다</a:t>
             </a:r>
           </a:p>
         </p:txBody>
@@ -14322,7 +14322,7 @@
                 <a:ea typeface="Pretendard"/>
                 <a:cs typeface="Pretendard"/>
               </a:rPr>
-              <a:t>docker ps 에 de-mongo 가 Up · 로그 끝에 Waiting for connections</a:t>
+              <a:t>docker ps 에 de-mongo 가 Up · ping 이 1</a:t>
             </a:r>
           </a:p>
         </p:txBody>
@@ -14468,7 +14468,7 @@
                 <a:ea typeface="Pretendard"/>
                 <a:cs typeface="Pretendard"/>
               </a:rPr>
-              <a:t>db.version() 이 7.0.x · use logdb 뒤 db 가 logdb</a:t>
+              <a:t>db.version() 이 7.0.43 · use logdb 뒤 db 가 logdb</a:t>
             </a:r>
           </a:p>
         </p:txBody>
@@ -14906,7 +14906,7 @@
                 <a:ea typeface="Pretendard"/>
                 <a:cs typeface="Pretendard"/>
               </a:rPr>
-              <a:t>Level 오타 문서가 level 조회에서 오류 없이 빠진다</a:t>
+              <a:t>Level 오타 문서가 들어가고 level 로 세면 1 — 오류 없이 빠진다</a:t>
             </a:r>
           </a:p>
         </p:txBody>

--- a/data-eng/decks/w2d3s2.pptx
+++ b/data-eng/decks/w2d3s2.pptx
@@ -3099,7 +3099,7 @@
       <p:grpSpPr/>
       <p:sp>
         <p:nvSpPr>
-          <p:cNvPr id="2" name="Oval 1"/>
+          <p:cNvPr id="2" name="deckgen:decor"/>
           <p:cNvSpPr/>
           <p:nvPr/>
         </p:nvSpPr>
@@ -3129,7 +3129,7 @@
       </p:sp>
       <p:sp>
         <p:nvSpPr>
-          <p:cNvPr id="3" name="Oval 2"/>
+          <p:cNvPr id="3" name="deckgen:decor"/>
           <p:cNvSpPr/>
           <p:nvPr/>
         </p:nvSpPr>
@@ -3159,7 +3159,7 @@
       </p:sp>
       <p:sp>
         <p:nvSpPr>
-          <p:cNvPr id="4" name="Oval 3"/>
+          <p:cNvPr id="4" name="deckgen:decor"/>
           <p:cNvSpPr/>
           <p:nvPr/>
         </p:nvSpPr>
@@ -3189,7 +3189,7 @@
       </p:sp>
       <p:sp>
         <p:nvSpPr>
-          <p:cNvPr id="5" name="Rectangle 4"/>
+          <p:cNvPr id="5" name="deckgen:decor"/>
           <p:cNvSpPr/>
           <p:nvPr/>
         </p:nvSpPr>
@@ -3219,7 +3219,7 @@
       </p:sp>
       <p:sp>
         <p:nvSpPr>
-          <p:cNvPr id="6" name="Oval 5"/>
+          <p:cNvPr id="6" name="deckgen:decor"/>
           <p:cNvSpPr/>
           <p:nvPr/>
         </p:nvSpPr>
@@ -3249,7 +3249,7 @@
       </p:sp>
       <p:sp>
         <p:nvSpPr>
-          <p:cNvPr id="7" name="Oval 6"/>
+          <p:cNvPr id="7" name="deckgen:decor"/>
           <p:cNvSpPr/>
           <p:nvPr/>
         </p:nvSpPr>
@@ -3279,7 +3279,7 @@
       </p:sp>
       <p:sp>
         <p:nvSpPr>
-          <p:cNvPr id="8" name="Oval 7"/>
+          <p:cNvPr id="8" name="deckgen:decor"/>
           <p:cNvSpPr/>
           <p:nvPr/>
         </p:nvSpPr>
@@ -3309,7 +3309,7 @@
       </p:sp>
       <p:sp>
         <p:nvSpPr>
-          <p:cNvPr id="9" name="Oval 8"/>
+          <p:cNvPr id="9" name="deckgen:decor"/>
           <p:cNvSpPr/>
           <p:nvPr/>
         </p:nvSpPr>
@@ -3339,7 +3339,7 @@
       </p:sp>
       <p:sp>
         <p:nvSpPr>
-          <p:cNvPr id="10" name="Rectangle 9"/>
+          <p:cNvPr id="10" name="deckgen:decor"/>
           <p:cNvSpPr/>
           <p:nvPr/>
         </p:nvSpPr>
@@ -3617,7 +3617,7 @@
       <p:grpSpPr/>
       <p:sp>
         <p:nvSpPr>
-          <p:cNvPr id="2" name="Oval 1"/>
+          <p:cNvPr id="2" name="deckgen:decor"/>
           <p:cNvSpPr/>
           <p:nvPr/>
         </p:nvSpPr>
@@ -3647,7 +3647,7 @@
       </p:sp>
       <p:sp>
         <p:nvSpPr>
-          <p:cNvPr id="3" name="Oval 2"/>
+          <p:cNvPr id="3" name="deckgen:decor"/>
           <p:cNvSpPr/>
           <p:nvPr/>
         </p:nvSpPr>
@@ -4424,7 +4424,7 @@
       <p:grpSpPr/>
       <p:sp>
         <p:nvSpPr>
-          <p:cNvPr id="2" name="Oval 1"/>
+          <p:cNvPr id="2" name="deckgen:decor"/>
           <p:cNvSpPr/>
           <p:nvPr/>
         </p:nvSpPr>
@@ -4454,7 +4454,7 @@
       </p:sp>
       <p:sp>
         <p:nvSpPr>
-          <p:cNvPr id="3" name="Oval 2"/>
+          <p:cNvPr id="3" name="deckgen:decor"/>
           <p:cNvSpPr/>
           <p:nvPr/>
         </p:nvSpPr>
@@ -4484,7 +4484,7 @@
       </p:sp>
       <p:sp>
         <p:nvSpPr>
-          <p:cNvPr id="4" name="Oval 3"/>
+          <p:cNvPr id="4" name="deckgen:decor"/>
           <p:cNvSpPr/>
           <p:nvPr/>
         </p:nvSpPr>
@@ -5415,7 +5415,7 @@
       <p:grpSpPr/>
       <p:sp>
         <p:nvSpPr>
-          <p:cNvPr id="2" name="Oval 1"/>
+          <p:cNvPr id="2" name="deckgen:decor"/>
           <p:cNvSpPr/>
           <p:nvPr/>
         </p:nvSpPr>
@@ -5445,7 +5445,7 @@
       </p:sp>
       <p:sp>
         <p:nvSpPr>
-          <p:cNvPr id="3" name="Oval 2"/>
+          <p:cNvPr id="3" name="deckgen:decor"/>
           <p:cNvSpPr/>
           <p:nvPr/>
         </p:nvSpPr>
@@ -5475,7 +5475,7 @@
       </p:sp>
       <p:sp>
         <p:nvSpPr>
-          <p:cNvPr id="4" name="Oval 3"/>
+          <p:cNvPr id="4" name="deckgen:decor"/>
           <p:cNvSpPr/>
           <p:nvPr/>
         </p:nvSpPr>
@@ -5756,7 +5756,7 @@
                 <a:ea typeface="Pretendard"/>
                 <a:cs typeface="Pretendard"/>
               </a:rPr>
-              <a:t>1 기동</a:t>
+              <a:t>1. 기동</a:t>
             </a:r>
           </a:p>
         </p:txBody>
@@ -5920,7 +5920,7 @@
                 <a:ea typeface="Pretendard"/>
                 <a:cs typeface="Pretendard"/>
               </a:rPr>
-              <a:t>2 접속</a:t>
+              <a:t>2. 접속</a:t>
             </a:r>
           </a:p>
         </p:txBody>
@@ -6084,7 +6084,7 @@
                 <a:ea typeface="Pretendard"/>
                 <a:cs typeface="Pretendard"/>
               </a:rPr>
-              <a:t>3 넣기</a:t>
+              <a:t>3. 넣기</a:t>
             </a:r>
           </a:p>
         </p:txBody>
@@ -6248,7 +6248,7 @@
                 <a:ea typeface="Pretendard"/>
                 <a:cs typeface="Pretendard"/>
               </a:rPr>
-              <a:t>4 찾기</a:t>
+              <a:t>4. 찾기</a:t>
             </a:r>
           </a:p>
         </p:txBody>
@@ -6412,7 +6412,7 @@
                 <a:ea typeface="Pretendard"/>
                 <a:cs typeface="Pretendard"/>
               </a:rPr>
-              <a:t>5·6 고치고 틀리기</a:t>
+              <a:t>5·6. 고치고 틀리기</a:t>
             </a:r>
           </a:p>
         </p:txBody>
@@ -6608,7 +6608,7 @@
       <p:grpSpPr/>
       <p:sp>
         <p:nvSpPr>
-          <p:cNvPr id="2" name="Oval 1"/>
+          <p:cNvPr id="2" name="deckgen:decor"/>
           <p:cNvSpPr/>
           <p:nvPr/>
         </p:nvSpPr>
@@ -6638,7 +6638,7 @@
       </p:sp>
       <p:sp>
         <p:nvSpPr>
-          <p:cNvPr id="3" name="Oval 2"/>
+          <p:cNvPr id="3" name="deckgen:decor"/>
           <p:cNvSpPr/>
           <p:nvPr/>
         </p:nvSpPr>
@@ -6668,7 +6668,7 @@
       </p:sp>
       <p:sp>
         <p:nvSpPr>
-          <p:cNvPr id="4" name="Oval 3"/>
+          <p:cNvPr id="4" name="deckgen:decor"/>
           <p:cNvSpPr/>
           <p:nvPr/>
         </p:nvSpPr>
@@ -7822,7 +7822,7 @@
       <p:grpSpPr/>
       <p:sp>
         <p:nvSpPr>
-          <p:cNvPr id="2" name="Oval 1"/>
+          <p:cNvPr id="2" name="deckgen:decor"/>
           <p:cNvSpPr/>
           <p:nvPr/>
         </p:nvSpPr>
@@ -7852,7 +7852,7 @@
       </p:sp>
       <p:sp>
         <p:nvSpPr>
-          <p:cNvPr id="3" name="Oval 2"/>
+          <p:cNvPr id="3" name="deckgen:decor"/>
           <p:cNvSpPr/>
           <p:nvPr/>
         </p:nvSpPr>
@@ -7882,7 +7882,7 @@
       </p:sp>
       <p:sp>
         <p:nvSpPr>
-          <p:cNvPr id="4" name="Oval 3"/>
+          <p:cNvPr id="4" name="deckgen:decor"/>
           <p:cNvSpPr/>
           <p:nvPr/>
         </p:nvSpPr>
@@ -9679,7 +9679,7 @@
       <p:grpSpPr/>
       <p:sp>
         <p:nvSpPr>
-          <p:cNvPr id="2" name="Oval 1"/>
+          <p:cNvPr id="2" name="deckgen:decor"/>
           <p:cNvSpPr/>
           <p:nvPr/>
         </p:nvSpPr>
@@ -9709,7 +9709,7 @@
       </p:sp>
       <p:sp>
         <p:nvSpPr>
-          <p:cNvPr id="3" name="Oval 2"/>
+          <p:cNvPr id="3" name="deckgen:decor"/>
           <p:cNvSpPr/>
           <p:nvPr/>
         </p:nvSpPr>
@@ -9739,7 +9739,7 @@
       </p:sp>
       <p:sp>
         <p:nvSpPr>
-          <p:cNvPr id="4" name="Oval 3"/>
+          <p:cNvPr id="4" name="deckgen:decor"/>
           <p:cNvSpPr/>
           <p:nvPr/>
         </p:nvSpPr>
@@ -11840,7 +11840,7 @@
       <p:grpSpPr/>
       <p:sp>
         <p:nvSpPr>
-          <p:cNvPr id="2" name="Oval 1"/>
+          <p:cNvPr id="2" name="deckgen:decor"/>
           <p:cNvSpPr/>
           <p:nvPr/>
         </p:nvSpPr>
@@ -11870,7 +11870,7 @@
       </p:sp>
       <p:sp>
         <p:nvSpPr>
-          <p:cNvPr id="3" name="Oval 2"/>
+          <p:cNvPr id="3" name="deckgen:decor"/>
           <p:cNvSpPr/>
           <p:nvPr/>
         </p:nvSpPr>
@@ -11900,7 +11900,7 @@
       </p:sp>
       <p:sp>
         <p:nvSpPr>
-          <p:cNvPr id="4" name="Oval 3"/>
+          <p:cNvPr id="4" name="deckgen:decor"/>
           <p:cNvSpPr/>
           <p:nvPr/>
         </p:nvSpPr>
@@ -12991,7 +12991,7 @@
       <p:grpSpPr/>
       <p:sp>
         <p:nvSpPr>
-          <p:cNvPr id="2" name="Oval 1"/>
+          <p:cNvPr id="2" name="deckgen:decor"/>
           <p:cNvSpPr/>
           <p:nvPr/>
         </p:nvSpPr>
@@ -13021,7 +13021,7 @@
       </p:sp>
       <p:sp>
         <p:nvSpPr>
-          <p:cNvPr id="3" name="Oval 2"/>
+          <p:cNvPr id="3" name="deckgen:decor"/>
           <p:cNvSpPr/>
           <p:nvPr/>
         </p:nvSpPr>
@@ -13051,7 +13051,7 @@
       </p:sp>
       <p:sp>
         <p:nvSpPr>
-          <p:cNvPr id="4" name="Oval 3"/>
+          <p:cNvPr id="4" name="deckgen:decor"/>
           <p:cNvSpPr/>
           <p:nvPr/>
         </p:nvSpPr>
@@ -13981,7 +13981,7 @@
       <p:grpSpPr/>
       <p:sp>
         <p:nvSpPr>
-          <p:cNvPr id="2" name="Oval 1"/>
+          <p:cNvPr id="2" name="deckgen:decor"/>
           <p:cNvSpPr/>
           <p:nvPr/>
         </p:nvSpPr>
@@ -14011,7 +14011,7 @@
       </p:sp>
       <p:sp>
         <p:nvSpPr>
-          <p:cNvPr id="3" name="Oval 2"/>
+          <p:cNvPr id="3" name="deckgen:decor"/>
           <p:cNvSpPr/>
           <p:nvPr/>
         </p:nvSpPr>
@@ -14041,7 +14041,7 @@
       </p:sp>
       <p:sp>
         <p:nvSpPr>
-          <p:cNvPr id="4" name="Oval 3"/>
+          <p:cNvPr id="4" name="deckgen:decor"/>
           <p:cNvSpPr/>
           <p:nvPr/>
         </p:nvSpPr>
